--- a/proposals/C_one_loop.pptx
+++ b/proposals/C_one_loop.pptx
@@ -4896,7 +4896,7 @@
           <a:p>
             <a:r>
               <a:rPr sz="2600"/>
-              <a:t>The keyboard, which Chrono reads for you (Lines 535 to 546, 589 to 592)</a:t>
+              <a:t>The keyboard, which Chrono reads for you (Lines 535 to 572, 589 to 592)</a:t>
             </a:r>
           </a:p>
         </p:txBody>
@@ -4954,7 +4954,7 @@
                 </a:solidFill>
                 <a:latin typeface="Consolas"/>
               </a:rPr>
-              <a:t>    # Arrow keys steer/accelerate/brake, 'C' centers steering, 'R' releases</a:t>
+              <a:t>    # W/A/S/D drive, 'C' centers steering, 'R' releases the pedals, 'L' locks</a:t>
             </a:r>
           </a:p>
           <a:p>
@@ -4965,7 +4965,7 @@
                 </a:solidFill>
                 <a:latin typeface="Consolas"/>
               </a:rPr>
-              <a:t>    # the pedals, 'L' locks the current inputs.</a:t>
+              <a:t>    # the inputs.  ARROW keys are the chase camera, not driving controls.</a:t>
             </a:r>
           </a:p>
           <a:p>
@@ -6130,7 +6130,7 @@
           <a:p>
             <a:r>
               <a:rPr sz="2600"/>
-              <a:t>Sample once, hold, then send state back (Lines 684 to 696, 745 to 755)</a:t>
+              <a:t>Sample once, hold, then send state back (Lines 710 to 722, 745 to 755)</a:t>
             </a:r>
           </a:p>
         </p:txBody>
@@ -8786,7 +8786,7 @@
             </a:r>
             <a:r>
               <a:rPr sz="2000"/>
-              <a:t> opens an Irrlicht window with an HMMWV - drive it with the arrow keys</a:t>
+              <a:t> opens an Irrlicht window with an HMMWV - drive it with W/A/S/D</a:t>
             </a:r>
           </a:p>
           <a:p>
@@ -9021,7 +9021,7 @@
           <a:p>
             <a:r>
               <a:rPr sz="2600"/>
-              <a:t>The loop, and where the driver is queried (Lines 674 to 725)</a:t>
+              <a:t>The loop, and where the driver is queried (Lines 700 to 751)</a:t>
             </a:r>
           </a:p>
         </p:txBody>
@@ -10092,7 +10092,7 @@
           <a:p>
             <a:r>
               <a:rPr sz="2600"/>
-              <a:t>Enforce real time, and measure the drift (Lines 631 to 645, 727 to 743)</a:t>
+              <a:t>Enforce real time, and measure the drift (Lines 657 to 671, 727 to 743)</a:t>
             </a:r>
           </a:p>
         </p:txBody>

--- a/proposals/C_one_loop.pptx
+++ b/proposals/C_one_loop.pptx
@@ -4896,7 +4896,7 @@
           <a:p>
             <a:r>
               <a:rPr sz="2600"/>
-              <a:t>The keyboard, which Chrono reads for you (Lines 535 to 572, 589 to 592)</a:t>
+              <a:t>The keyboard, which Chrono reads for you (Lines 535 to 572, 615 to 618)</a:t>
             </a:r>
           </a:p>
         </p:txBody>
@@ -6130,7 +6130,7 @@
           <a:p>
             <a:r>
               <a:rPr sz="2600"/>
-              <a:t>Sample once, hold, then send state back (Lines 710 to 722, 745 to 755)</a:t>
+              <a:t>Sample once, hold, then send state back (Lines 710 to 722, 771 to 781)</a:t>
             </a:r>
           </a:p>
         </p:txBody>
@@ -10092,7 +10092,7 @@
           <a:p>
             <a:r>
               <a:rPr sz="2600"/>
-              <a:t>Enforce real time, and measure the drift (Lines 657 to 671, 727 to 743)</a:t>
+              <a:t>Enforce real time, and measure the drift (Lines 657 to 671, 753 to 769)</a:t>
             </a:r>
           </a:p>
         </p:txBody>
